--- a/hackathon/hack_slides.pptx
+++ b/hackathon/hack_slides.pptx
@@ -5,7 +5,8 @@
     <p:sldMasterId id="2147483648" r:id="rId1"/>
   </p:sldMasterIdLst>
   <p:sldIdLst>
-    <p:sldId id="256" r:id="rId2"/>
+    <p:sldId id="257" r:id="rId2"/>
+    <p:sldId id="256" r:id="rId3"/>
   </p:sldIdLst>
   <p:sldSz cx="12192000" cy="6858000"/>
   <p:notesSz cx="6858000" cy="9144000"/>
@@ -259,7 +260,7 @@
           <a:p>
             <a:fld id="{C6615F0D-F200-F043-B1BE-C522FD099F7F}" type="datetimeFigureOut">
               <a:rPr lang="en-GB" smtClean="0"/>
-              <a:t>28/08/2023</a:t>
+              <a:t>26/08/2024</a:t>
             </a:fld>
             <a:endParaRPr lang="en-GB"/>
           </a:p>
@@ -457,7 +458,7 @@
           <a:p>
             <a:fld id="{C6615F0D-F200-F043-B1BE-C522FD099F7F}" type="datetimeFigureOut">
               <a:rPr lang="en-GB" smtClean="0"/>
-              <a:t>28/08/2023</a:t>
+              <a:t>26/08/2024</a:t>
             </a:fld>
             <a:endParaRPr lang="en-GB"/>
           </a:p>
@@ -665,7 +666,7 @@
           <a:p>
             <a:fld id="{C6615F0D-F200-F043-B1BE-C522FD099F7F}" type="datetimeFigureOut">
               <a:rPr lang="en-GB" smtClean="0"/>
-              <a:t>28/08/2023</a:t>
+              <a:t>26/08/2024</a:t>
             </a:fld>
             <a:endParaRPr lang="en-GB"/>
           </a:p>
@@ -863,7 +864,7 @@
           <a:p>
             <a:fld id="{C6615F0D-F200-F043-B1BE-C522FD099F7F}" type="datetimeFigureOut">
               <a:rPr lang="en-GB" smtClean="0"/>
-              <a:t>28/08/2023</a:t>
+              <a:t>26/08/2024</a:t>
             </a:fld>
             <a:endParaRPr lang="en-GB"/>
           </a:p>
@@ -1138,7 +1139,7 @@
           <a:p>
             <a:fld id="{C6615F0D-F200-F043-B1BE-C522FD099F7F}" type="datetimeFigureOut">
               <a:rPr lang="en-GB" smtClean="0"/>
-              <a:t>28/08/2023</a:t>
+              <a:t>26/08/2024</a:t>
             </a:fld>
             <a:endParaRPr lang="en-GB"/>
           </a:p>
@@ -1403,7 +1404,7 @@
           <a:p>
             <a:fld id="{C6615F0D-F200-F043-B1BE-C522FD099F7F}" type="datetimeFigureOut">
               <a:rPr lang="en-GB" smtClean="0"/>
-              <a:t>28/08/2023</a:t>
+              <a:t>26/08/2024</a:t>
             </a:fld>
             <a:endParaRPr lang="en-GB"/>
           </a:p>
@@ -1815,7 +1816,7 @@
           <a:p>
             <a:fld id="{C6615F0D-F200-F043-B1BE-C522FD099F7F}" type="datetimeFigureOut">
               <a:rPr lang="en-GB" smtClean="0"/>
-              <a:t>28/08/2023</a:t>
+              <a:t>26/08/2024</a:t>
             </a:fld>
             <a:endParaRPr lang="en-GB"/>
           </a:p>
@@ -1956,7 +1957,7 @@
           <a:p>
             <a:fld id="{C6615F0D-F200-F043-B1BE-C522FD099F7F}" type="datetimeFigureOut">
               <a:rPr lang="en-GB" smtClean="0"/>
-              <a:t>28/08/2023</a:t>
+              <a:t>26/08/2024</a:t>
             </a:fld>
             <a:endParaRPr lang="en-GB"/>
           </a:p>
@@ -2069,7 +2070,7 @@
           <a:p>
             <a:fld id="{C6615F0D-F200-F043-B1BE-C522FD099F7F}" type="datetimeFigureOut">
               <a:rPr lang="en-GB" smtClean="0"/>
-              <a:t>28/08/2023</a:t>
+              <a:t>26/08/2024</a:t>
             </a:fld>
             <a:endParaRPr lang="en-GB"/>
           </a:p>
@@ -2380,7 +2381,7 @@
           <a:p>
             <a:fld id="{C6615F0D-F200-F043-B1BE-C522FD099F7F}" type="datetimeFigureOut">
               <a:rPr lang="en-GB" smtClean="0"/>
-              <a:t>28/08/2023</a:t>
+              <a:t>26/08/2024</a:t>
             </a:fld>
             <a:endParaRPr lang="en-GB"/>
           </a:p>
@@ -2668,7 +2669,7 @@
           <a:p>
             <a:fld id="{C6615F0D-F200-F043-B1BE-C522FD099F7F}" type="datetimeFigureOut">
               <a:rPr lang="en-GB" smtClean="0"/>
-              <a:t>28/08/2023</a:t>
+              <a:t>26/08/2024</a:t>
             </a:fld>
             <a:endParaRPr lang="en-GB"/>
           </a:p>
@@ -2909,7 +2910,7 @@
           <a:p>
             <a:fld id="{C6615F0D-F200-F043-B1BE-C522FD099F7F}" type="datetimeFigureOut">
               <a:rPr lang="en-GB" smtClean="0"/>
-              <a:t>28/08/2023</a:t>
+              <a:t>26/08/2024</a:t>
             </a:fld>
             <a:endParaRPr lang="en-GB"/>
           </a:p>
@@ -3310,6 +3311,153 @@
 </file>
 
 <file path=ppt/slides/slide1.xml><?xml version="1.0" encoding="utf-8"?>
+<p:sld xmlns:a="http://schemas.openxmlformats.org/drawingml/2006/main" xmlns:r="http://schemas.openxmlformats.org/officeDocument/2006/relationships" xmlns:p="http://schemas.openxmlformats.org/presentationml/2006/main">
+  <p:cSld>
+    <p:spTree>
+      <p:nvGrpSpPr>
+        <p:cNvPr id="1" name=""/>
+        <p:cNvGrpSpPr/>
+        <p:nvPr/>
+      </p:nvGrpSpPr>
+      <p:grpSpPr>
+        <a:xfrm>
+          <a:off x="0" y="0"/>
+          <a:ext cx="0" cy="0"/>
+          <a:chOff x="0" y="0"/>
+          <a:chExt cx="0" cy="0"/>
+        </a:xfrm>
+      </p:grpSpPr>
+      <p:sp>
+        <p:nvSpPr>
+          <p:cNvPr id="2" name="Title 1">
+            <a:extLst>
+              <a:ext uri="{FF2B5EF4-FFF2-40B4-BE49-F238E27FC236}">
+                <a16:creationId xmlns:a16="http://schemas.microsoft.com/office/drawing/2014/main" id="{B3D48481-22B1-068E-CD3C-C30E626B1942}"/>
+              </a:ext>
+            </a:extLst>
+          </p:cNvPr>
+          <p:cNvSpPr>
+            <a:spLocks noGrp="1"/>
+          </p:cNvSpPr>
+          <p:nvPr>
+            <p:ph type="title"/>
+          </p:nvPr>
+        </p:nvSpPr>
+        <p:spPr/>
+        <p:txBody>
+          <a:bodyPr/>
+          <a:lstStyle/>
+          <a:p>
+            <a:r>
+              <a:rPr lang="en-GB" b="1" dirty="0"/>
+              <a:t>28 AUGUST KL 9-16</a:t>
+            </a:r>
+          </a:p>
+        </p:txBody>
+      </p:sp>
+      <p:pic>
+        <p:nvPicPr>
+          <p:cNvPr id="5" name="Content Placeholder 4" descr="A group of children in a classroom&#10;&#10;Description automatically generated">
+            <a:extLst>
+              <a:ext uri="{FF2B5EF4-FFF2-40B4-BE49-F238E27FC236}">
+                <a16:creationId xmlns:a16="http://schemas.microsoft.com/office/drawing/2014/main" id="{C4EA95CA-E248-D8E0-009A-D7FC05EEFFB8}"/>
+              </a:ext>
+            </a:extLst>
+          </p:cNvPr>
+          <p:cNvPicPr>
+            <a:picLocks noGrp="1" noChangeAspect="1"/>
+          </p:cNvPicPr>
+          <p:nvPr>
+            <p:ph idx="1"/>
+          </p:nvPr>
+        </p:nvPicPr>
+        <p:blipFill>
+          <a:blip r:embed="rId2"/>
+          <a:stretch>
+            <a:fillRect/>
+          </a:stretch>
+        </p:blipFill>
+        <p:spPr>
+          <a:xfrm>
+            <a:off x="838200" y="1463651"/>
+            <a:ext cx="6796024" cy="4213535"/>
+          </a:xfrm>
+        </p:spPr>
+      </p:pic>
+      <p:pic>
+        <p:nvPicPr>
+          <p:cNvPr id="7" name="Picture 6" descr="A group of people in a room&#10;&#10;Description automatically generated">
+            <a:extLst>
+              <a:ext uri="{FF2B5EF4-FFF2-40B4-BE49-F238E27FC236}">
+                <a16:creationId xmlns:a16="http://schemas.microsoft.com/office/drawing/2014/main" id="{DD34797A-BB1E-6F5E-9DA0-09680C72552A}"/>
+              </a:ext>
+            </a:extLst>
+          </p:cNvPr>
+          <p:cNvPicPr>
+            <a:picLocks noChangeAspect="1"/>
+          </p:cNvPicPr>
+          <p:nvPr/>
+        </p:nvPicPr>
+        <p:blipFill>
+          <a:blip r:embed="rId3"/>
+          <a:stretch>
+            <a:fillRect/>
+          </a:stretch>
+        </p:blipFill>
+        <p:spPr>
+          <a:xfrm>
+            <a:off x="8481763" y="677019"/>
+            <a:ext cx="3356518" cy="2520666"/>
+          </a:xfrm>
+          <a:prstGeom prst="rect">
+            <a:avLst/>
+          </a:prstGeom>
+        </p:spPr>
+      </p:pic>
+      <p:pic>
+        <p:nvPicPr>
+          <p:cNvPr id="9" name="Picture 8" descr="A person working on a device&#10;&#10;Description automatically generated">
+            <a:extLst>
+              <a:ext uri="{FF2B5EF4-FFF2-40B4-BE49-F238E27FC236}">
+                <a16:creationId xmlns:a16="http://schemas.microsoft.com/office/drawing/2014/main" id="{B4B3F6B9-09A8-FEC1-0286-8DE1C12C2D51}"/>
+              </a:ext>
+            </a:extLst>
+          </p:cNvPr>
+          <p:cNvPicPr>
+            <a:picLocks noChangeAspect="1"/>
+          </p:cNvPicPr>
+          <p:nvPr/>
+        </p:nvPicPr>
+        <p:blipFill>
+          <a:blip r:embed="rId4"/>
+          <a:stretch>
+            <a:fillRect/>
+          </a:stretch>
+        </p:blipFill>
+        <p:spPr>
+          <a:xfrm>
+            <a:off x="8481762" y="3660314"/>
+            <a:ext cx="3356519" cy="2520667"/>
+          </a:xfrm>
+          <a:prstGeom prst="rect">
+            <a:avLst/>
+          </a:prstGeom>
+        </p:spPr>
+      </p:pic>
+    </p:spTree>
+    <p:extLst>
+      <p:ext uri="{BB962C8B-B14F-4D97-AF65-F5344CB8AC3E}">
+        <p14:creationId xmlns:p14="http://schemas.microsoft.com/office/powerpoint/2010/main" val="2203805074"/>
+      </p:ext>
+    </p:extLst>
+  </p:cSld>
+  <p:clrMapOvr>
+    <a:masterClrMapping/>
+  </p:clrMapOvr>
+</p:sld>
+</file>
+
+<file path=ppt/slides/slide2.xml><?xml version="1.0" encoding="utf-8"?>
 <p:sld xmlns:a="http://schemas.openxmlformats.org/drawingml/2006/main" xmlns:r="http://schemas.openxmlformats.org/officeDocument/2006/relationships" xmlns:p="http://schemas.openxmlformats.org/presentationml/2006/main">
   <p:cSld>
     <p:spTree>
@@ -3965,4 +4113,10 @@
     </a:ext>
   </a:extLst>
 </a:theme>
+</file>
+
+<file path=docMetadata/LabelInfo.xml><?xml version="1.0" encoding="utf-8"?>
+<clbl:labelList xmlns:clbl="http://schemas.microsoft.com/office/2020/mipLabelMetadata">
+  <clbl:label id="{6a2630e2-1ac5-455e-8217-0156b1936a76}" enabled="1" method="Standard" siteId="{a3927f91-cda1-4696-af89-8c9f1ceffa91}" contentBits="0" removed="0"/>
+</clbl:labelList>
 </file>